--- a/KernelSage_答辩演示PPT.pptx
+++ b/KernelSage_答辩演示PPT.pptx
@@ -2336,6 +2336,30 @@
           </a:p>
         </p:txBody>
       </p:sp>
+      <p:pic>
+        <p:nvPicPr>
+          <p:cNvPr id="7" name="图片 6" descr="tjnu_logo"/>
+          <p:cNvPicPr>
+            <a:picLocks noChangeAspect="1"/>
+          </p:cNvPicPr>
+          <p:nvPr userDrawn="1"/>
+        </p:nvPicPr>
+        <p:blipFill>
+          <a:blip r:embed="rId2"/>
+          <a:stretch>
+            <a:fillRect/>
+          </a:stretch>
+        </p:blipFill>
+        <p:spPr>
+          <a:xfrm>
+            <a:off x="9332595" y="103505"/>
+            <a:ext cx="2698115" cy="669290"/>
+          </a:xfrm>
+          <a:prstGeom prst="rect">
+            <a:avLst/>
+          </a:prstGeom>
+        </p:spPr>
+      </p:pic>
     </p:spTree>
   </p:cSld>
   <p:clrMapOvr>
@@ -5779,6 +5803,30 @@
           </a:p>
         </p:txBody>
       </p:sp>
+      <p:pic>
+        <p:nvPicPr>
+          <p:cNvPr id="7" name="图片 6" descr="tjnu_logo"/>
+          <p:cNvPicPr>
+            <a:picLocks noChangeAspect="1"/>
+          </p:cNvPicPr>
+          <p:nvPr userDrawn="1"/>
+        </p:nvPicPr>
+        <p:blipFill>
+          <a:blip r:embed="rId2"/>
+          <a:stretch>
+            <a:fillRect/>
+          </a:stretch>
+        </p:blipFill>
+        <p:spPr>
+          <a:xfrm>
+            <a:off x="9332595" y="103505"/>
+            <a:ext cx="2698115" cy="669290"/>
+          </a:xfrm>
+          <a:prstGeom prst="rect">
+            <a:avLst/>
+          </a:prstGeom>
+        </p:spPr>
+      </p:pic>
     </p:spTree>
   </p:cSld>
   <p:clrMapOvr>
@@ -9092,37 +9140,6 @@
           <a:chExt cx="0" cy="0"/>
         </a:xfrm>
       </p:grpSpPr>
-      <p:pic>
-        <p:nvPicPr>
-          <p:cNvPr id="13" name="图片 12"/>
-          <p:cNvPicPr>
-            <a:picLocks noChangeAspect="1"/>
-          </p:cNvPicPr>
-          <p:nvPr/>
-        </p:nvPicPr>
-        <p:blipFill rotWithShape="1">
-          <a:blip r:embed="rId1" cstate="print">
-            <a:extLst>
-              <a:ext uri="{28A0092B-C50C-407E-A947-70E740481C1C}">
-                <a14:useLocalDpi xmlns:a14="http://schemas.microsoft.com/office/drawing/2010/main" val="0"/>
-              </a:ext>
-            </a:extLst>
-          </a:blip>
-          <a:srcRect t="23546" b="8830"/>
-          <a:stretch>
-            <a:fillRect/>
-          </a:stretch>
-        </p:blipFill>
-        <p:spPr>
-          <a:xfrm>
-            <a:off x="9815333" y="135922"/>
-            <a:ext cx="2376667" cy="734513"/>
-          </a:xfrm>
-          <a:prstGeom prst="rect">
-            <a:avLst/>
-          </a:prstGeom>
-        </p:spPr>
-      </p:pic>
       <p:sp>
         <p:nvSpPr>
           <p:cNvPr id="5" name="矩形 4"/>
@@ -9540,7 +9557,7 @@
           <p:cNvSpPr/>
           <p:nvPr>
             <p:custDataLst>
-              <p:tags r:id="rId2"/>
+              <p:tags r:id="rId1"/>
             </p:custDataLst>
           </p:nvPr>
         </p:nvSpPr>
@@ -9810,37 +9827,6 @@
           <a:chExt cx="0" cy="0"/>
         </a:xfrm>
       </p:grpSpPr>
-      <p:pic>
-        <p:nvPicPr>
-          <p:cNvPr id="13" name="图片 12"/>
-          <p:cNvPicPr>
-            <a:picLocks noChangeAspect="1"/>
-          </p:cNvPicPr>
-          <p:nvPr/>
-        </p:nvPicPr>
-        <p:blipFill rotWithShape="1">
-          <a:blip r:embed="rId1" cstate="print">
-            <a:extLst>
-              <a:ext uri="{28A0092B-C50C-407E-A947-70E740481C1C}">
-                <a14:useLocalDpi xmlns:a14="http://schemas.microsoft.com/office/drawing/2010/main" val="0"/>
-              </a:ext>
-            </a:extLst>
-          </a:blip>
-          <a:srcRect t="23546" b="8830"/>
-          <a:stretch>
-            <a:fillRect/>
-          </a:stretch>
-        </p:blipFill>
-        <p:spPr>
-          <a:xfrm>
-            <a:off x="9815333" y="135922"/>
-            <a:ext cx="2376667" cy="734513"/>
-          </a:xfrm>
-          <a:prstGeom prst="rect">
-            <a:avLst/>
-          </a:prstGeom>
-        </p:spPr>
-      </p:pic>
       <p:sp>
         <p:nvSpPr>
           <p:cNvPr id="5" name="矩形 4"/>
@@ -10259,7 +10245,7 @@
           <p:cNvSpPr/>
           <p:nvPr>
             <p:custDataLst>
-              <p:tags r:id="rId2"/>
+              <p:tags r:id="rId1"/>
             </p:custDataLst>
           </p:nvPr>
         </p:nvSpPr>
@@ -10469,37 +10455,6 @@
           <a:chExt cx="0" cy="0"/>
         </a:xfrm>
       </p:grpSpPr>
-      <p:pic>
-        <p:nvPicPr>
-          <p:cNvPr id="13" name="图片 12"/>
-          <p:cNvPicPr>
-            <a:picLocks noChangeAspect="1"/>
-          </p:cNvPicPr>
-          <p:nvPr/>
-        </p:nvPicPr>
-        <p:blipFill rotWithShape="1">
-          <a:blip r:embed="rId1" cstate="print">
-            <a:extLst>
-              <a:ext uri="{28A0092B-C50C-407E-A947-70E740481C1C}">
-                <a14:useLocalDpi xmlns:a14="http://schemas.microsoft.com/office/drawing/2010/main" val="0"/>
-              </a:ext>
-            </a:extLst>
-          </a:blip>
-          <a:srcRect t="23546" b="8830"/>
-          <a:stretch>
-            <a:fillRect/>
-          </a:stretch>
-        </p:blipFill>
-        <p:spPr>
-          <a:xfrm>
-            <a:off x="9815333" y="135922"/>
-            <a:ext cx="2376667" cy="734513"/>
-          </a:xfrm>
-          <a:prstGeom prst="rect">
-            <a:avLst/>
-          </a:prstGeom>
-        </p:spPr>
-      </p:pic>
       <p:sp>
         <p:nvSpPr>
           <p:cNvPr id="5" name="矩形 4"/>
@@ -10918,7 +10873,7 @@
           <p:cNvSpPr/>
           <p:nvPr>
             <p:custDataLst>
-              <p:tags r:id="rId2"/>
+              <p:tags r:id="rId1"/>
             </p:custDataLst>
           </p:nvPr>
         </p:nvSpPr>
@@ -11128,37 +11083,6 @@
           <a:chExt cx="0" cy="0"/>
         </a:xfrm>
       </p:grpSpPr>
-      <p:pic>
-        <p:nvPicPr>
-          <p:cNvPr id="13" name="图片 12"/>
-          <p:cNvPicPr>
-            <a:picLocks noChangeAspect="1"/>
-          </p:cNvPicPr>
-          <p:nvPr/>
-        </p:nvPicPr>
-        <p:blipFill rotWithShape="1">
-          <a:blip r:embed="rId1" cstate="print">
-            <a:extLst>
-              <a:ext uri="{28A0092B-C50C-407E-A947-70E740481C1C}">
-                <a14:useLocalDpi xmlns:a14="http://schemas.microsoft.com/office/drawing/2010/main" val="0"/>
-              </a:ext>
-            </a:extLst>
-          </a:blip>
-          <a:srcRect t="23546" b="8830"/>
-          <a:stretch>
-            <a:fillRect/>
-          </a:stretch>
-        </p:blipFill>
-        <p:spPr>
-          <a:xfrm>
-            <a:off x="9815333" y="135922"/>
-            <a:ext cx="2376667" cy="734513"/>
-          </a:xfrm>
-          <a:prstGeom prst="rect">
-            <a:avLst/>
-          </a:prstGeom>
-        </p:spPr>
-      </p:pic>
       <p:sp>
         <p:nvSpPr>
           <p:cNvPr id="5" name="矩形 4"/>
@@ -11716,37 +11640,6 @@
           <a:chExt cx="0" cy="0"/>
         </a:xfrm>
       </p:grpSpPr>
-      <p:pic>
-        <p:nvPicPr>
-          <p:cNvPr id="13" name="图片 12"/>
-          <p:cNvPicPr>
-            <a:picLocks noChangeAspect="1"/>
-          </p:cNvPicPr>
-          <p:nvPr/>
-        </p:nvPicPr>
-        <p:blipFill rotWithShape="1">
-          <a:blip r:embed="rId1" cstate="print">
-            <a:extLst>
-              <a:ext uri="{28A0092B-C50C-407E-A947-70E740481C1C}">
-                <a14:useLocalDpi xmlns:a14="http://schemas.microsoft.com/office/drawing/2010/main" val="0"/>
-              </a:ext>
-            </a:extLst>
-          </a:blip>
-          <a:srcRect t="23546" b="8830"/>
-          <a:stretch>
-            <a:fillRect/>
-          </a:stretch>
-        </p:blipFill>
-        <p:spPr>
-          <a:xfrm>
-            <a:off x="9815333" y="135922"/>
-            <a:ext cx="2376667" cy="734513"/>
-          </a:xfrm>
-          <a:prstGeom prst="rect">
-            <a:avLst/>
-          </a:prstGeom>
-        </p:spPr>
-      </p:pic>
       <p:sp>
         <p:nvSpPr>
           <p:cNvPr id="5" name="矩形 4"/>
@@ -12289,37 +12182,6 @@
           <a:chExt cx="0" cy="0"/>
         </a:xfrm>
       </p:grpSpPr>
-      <p:pic>
-        <p:nvPicPr>
-          <p:cNvPr id="13" name="图片 12"/>
-          <p:cNvPicPr>
-            <a:picLocks noChangeAspect="1"/>
-          </p:cNvPicPr>
-          <p:nvPr/>
-        </p:nvPicPr>
-        <p:blipFill rotWithShape="1">
-          <a:blip r:embed="rId1" cstate="print">
-            <a:extLst>
-              <a:ext uri="{28A0092B-C50C-407E-A947-70E740481C1C}">
-                <a14:useLocalDpi xmlns:a14="http://schemas.microsoft.com/office/drawing/2010/main" val="0"/>
-              </a:ext>
-            </a:extLst>
-          </a:blip>
-          <a:srcRect t="23546" b="8830"/>
-          <a:stretch>
-            <a:fillRect/>
-          </a:stretch>
-        </p:blipFill>
-        <p:spPr>
-          <a:xfrm>
-            <a:off x="9815333" y="135922"/>
-            <a:ext cx="2376667" cy="734513"/>
-          </a:xfrm>
-          <a:prstGeom prst="rect">
-            <a:avLst/>
-          </a:prstGeom>
-        </p:spPr>
-      </p:pic>
       <p:sp>
         <p:nvSpPr>
           <p:cNvPr id="5" name="矩形 4"/>
@@ -13410,44 +13272,13 @@
           </a:p>
         </p:txBody>
       </p:sp>
-      <p:pic>
-        <p:nvPicPr>
-          <p:cNvPr id="21" name="图片 20"/>
-          <p:cNvPicPr>
-            <a:picLocks noChangeAspect="1"/>
-          </p:cNvPicPr>
-          <p:nvPr/>
-        </p:nvPicPr>
-        <p:blipFill rotWithShape="1">
-          <a:blip r:embed="rId1" cstate="print">
-            <a:extLst>
-              <a:ext uri="{28A0092B-C50C-407E-A947-70E740481C1C}">
-                <a14:useLocalDpi xmlns:a14="http://schemas.microsoft.com/office/drawing/2010/main" val="0"/>
-              </a:ext>
-            </a:extLst>
-          </a:blip>
-          <a:srcRect t="23546" b="8830"/>
-          <a:stretch>
-            <a:fillRect/>
-          </a:stretch>
-        </p:blipFill>
-        <p:spPr>
-          <a:xfrm>
-            <a:off x="9815333" y="135922"/>
-            <a:ext cx="2376667" cy="734513"/>
-          </a:xfrm>
-          <a:prstGeom prst="rect">
-            <a:avLst/>
-          </a:prstGeom>
-        </p:spPr>
-      </p:pic>
       <p:sp>
         <p:nvSpPr>
           <p:cNvPr id="10" name="矩形 9"/>
           <p:cNvSpPr/>
           <p:nvPr>
             <p:custDataLst>
-              <p:tags r:id="rId2"/>
+              <p:tags r:id="rId1"/>
             </p:custDataLst>
           </p:nvPr>
         </p:nvSpPr>
@@ -13497,7 +13328,7 @@
           <p:cNvSpPr txBox="1"/>
           <p:nvPr>
             <p:custDataLst>
-              <p:tags r:id="rId3"/>
+              <p:tags r:id="rId2"/>
             </p:custDataLst>
           </p:nvPr>
         </p:nvSpPr>
@@ -13544,7 +13375,7 @@
           <p:cNvSpPr/>
           <p:nvPr>
             <p:custDataLst>
-              <p:tags r:id="rId4"/>
+              <p:tags r:id="rId3"/>
             </p:custDataLst>
           </p:nvPr>
         </p:nvSpPr>
@@ -13610,7 +13441,7 @@
           <p:cNvSpPr/>
           <p:nvPr>
             <p:custDataLst>
-              <p:tags r:id="rId5"/>
+              <p:tags r:id="rId4"/>
             </p:custDataLst>
           </p:nvPr>
         </p:nvSpPr>
@@ -13670,7 +13501,7 @@
           <p:cNvSpPr/>
           <p:nvPr>
             <p:custDataLst>
-              <p:tags r:id="rId6"/>
+              <p:tags r:id="rId5"/>
             </p:custDataLst>
           </p:nvPr>
         </p:nvSpPr>
@@ -13720,7 +13551,7 @@
           <p:cNvSpPr txBox="1"/>
           <p:nvPr>
             <p:custDataLst>
-              <p:tags r:id="rId7"/>
+              <p:tags r:id="rId6"/>
             </p:custDataLst>
           </p:nvPr>
         </p:nvSpPr>
@@ -13767,7 +13598,7 @@
           <p:cNvSpPr txBox="1"/>
           <p:nvPr>
             <p:custDataLst>
-              <p:tags r:id="rId8"/>
+              <p:tags r:id="rId7"/>
             </p:custDataLst>
           </p:nvPr>
         </p:nvSpPr>
@@ -13804,6 +13635,46 @@
       <p:sp>
         <p:nvSpPr>
           <p:cNvPr id="37" name="文本框 36"/>
+          <p:cNvSpPr txBox="1"/>
+          <p:nvPr>
+            <p:custDataLst>
+              <p:tags r:id="rId8"/>
+            </p:custDataLst>
+          </p:nvPr>
+        </p:nvSpPr>
+        <p:spPr>
+          <a:xfrm>
+            <a:off x="3888105" y="2454275"/>
+            <a:ext cx="2207895" cy="521970"/>
+          </a:xfrm>
+          <a:prstGeom prst="rect">
+            <a:avLst/>
+          </a:prstGeom>
+          <a:noFill/>
+        </p:spPr>
+        <p:txBody>
+          <a:bodyPr wrap="square" rtlCol="0">
+            <a:spAutoFit/>
+          </a:bodyPr>
+          <a:lstStyle/>
+          <a:p>
+            <a:r>
+              <a:rPr lang="zh-CN" altLang="en-US" sz="2800">
+                <a:latin typeface="方正小标宋简体" panose="03000509000000000000" charset="-122"/>
+                <a:ea typeface="方正小标宋简体" panose="03000509000000000000" charset="-122"/>
+              </a:rPr>
+              <a:t>技术思路</a:t>
+            </a:r>
+            <a:endParaRPr lang="zh-CN" altLang="en-US" sz="2800">
+              <a:latin typeface="方正小标宋简体" panose="03000509000000000000" charset="-122"/>
+              <a:ea typeface="方正小标宋简体" panose="03000509000000000000" charset="-122"/>
+            </a:endParaRPr>
+          </a:p>
+        </p:txBody>
+      </p:sp>
+      <p:sp>
+        <p:nvSpPr>
+          <p:cNvPr id="2" name="文本框 1"/>
           <p:cNvSpPr txBox="1"/>
           <p:nvPr>
             <p:custDataLst>
@@ -13813,8 +13684,8 @@
         </p:nvSpPr>
         <p:spPr>
           <a:xfrm>
-            <a:off x="3888105" y="2454275"/>
-            <a:ext cx="2207895" cy="521970"/>
+            <a:off x="3888105" y="3474085"/>
+            <a:ext cx="4064000" cy="521970"/>
           </a:xfrm>
           <a:prstGeom prst="rect">
             <a:avLst/>
@@ -13827,46 +13698,6 @@
           </a:bodyPr>
           <a:lstStyle/>
           <a:p>
-            <a:r>
-              <a:rPr lang="zh-CN" altLang="en-US" sz="2800">
-                <a:latin typeface="方正小标宋简体" panose="03000509000000000000" charset="-122"/>
-                <a:ea typeface="方正小标宋简体" panose="03000509000000000000" charset="-122"/>
-              </a:rPr>
-              <a:t>技术思路</a:t>
-            </a:r>
-            <a:endParaRPr lang="zh-CN" altLang="en-US" sz="2800">
-              <a:latin typeface="方正小标宋简体" panose="03000509000000000000" charset="-122"/>
-              <a:ea typeface="方正小标宋简体" panose="03000509000000000000" charset="-122"/>
-            </a:endParaRPr>
-          </a:p>
-        </p:txBody>
-      </p:sp>
-      <p:sp>
-        <p:nvSpPr>
-          <p:cNvPr id="2" name="文本框 1"/>
-          <p:cNvSpPr txBox="1"/>
-          <p:nvPr>
-            <p:custDataLst>
-              <p:tags r:id="rId10"/>
-            </p:custDataLst>
-          </p:nvPr>
-        </p:nvSpPr>
-        <p:spPr>
-          <a:xfrm>
-            <a:off x="3888105" y="3474085"/>
-            <a:ext cx="4064000" cy="521970"/>
-          </a:xfrm>
-          <a:prstGeom prst="rect">
-            <a:avLst/>
-          </a:prstGeom>
-          <a:noFill/>
-        </p:spPr>
-        <p:txBody>
-          <a:bodyPr wrap="square" rtlCol="0">
-            <a:spAutoFit/>
-          </a:bodyPr>
-          <a:lstStyle/>
-          <a:p>
             <a:pPr algn="l">
               <a:buClrTx/>
               <a:buSzTx/>
@@ -13892,7 +13723,7 @@
           <p:cNvSpPr txBox="1"/>
           <p:nvPr>
             <p:custDataLst>
-              <p:tags r:id="rId11"/>
+              <p:tags r:id="rId10"/>
             </p:custDataLst>
           </p:nvPr>
         </p:nvSpPr>
@@ -13963,37 +13794,6 @@
           <a:chExt cx="0" cy="0"/>
         </a:xfrm>
       </p:grpSpPr>
-      <p:pic>
-        <p:nvPicPr>
-          <p:cNvPr id="13" name="图片 12"/>
-          <p:cNvPicPr>
-            <a:picLocks noChangeAspect="1"/>
-          </p:cNvPicPr>
-          <p:nvPr/>
-        </p:nvPicPr>
-        <p:blipFill rotWithShape="1">
-          <a:blip r:embed="rId1" cstate="print">
-            <a:extLst>
-              <a:ext uri="{28A0092B-C50C-407E-A947-70E740481C1C}">
-                <a14:useLocalDpi xmlns:a14="http://schemas.microsoft.com/office/drawing/2010/main" val="0"/>
-              </a:ext>
-            </a:extLst>
-          </a:blip>
-          <a:srcRect t="23546" b="8830"/>
-          <a:stretch>
-            <a:fillRect/>
-          </a:stretch>
-        </p:blipFill>
-        <p:spPr>
-          <a:xfrm>
-            <a:off x="9815333" y="135922"/>
-            <a:ext cx="2376667" cy="734513"/>
-          </a:xfrm>
-          <a:prstGeom prst="rect">
-            <a:avLst/>
-          </a:prstGeom>
-        </p:spPr>
-      </p:pic>
       <p:sp>
         <p:nvSpPr>
           <p:cNvPr id="5" name="矩形 4"/>
@@ -14360,7 +14160,7 @@
           <p:cNvSpPr/>
           <p:nvPr>
             <p:custDataLst>
-              <p:tags r:id="rId2"/>
+              <p:tags r:id="rId1"/>
             </p:custDataLst>
           </p:nvPr>
         </p:nvSpPr>
@@ -14497,8 +14297,8 @@
         </p:nvSpPr>
         <p:spPr>
           <a:xfrm>
-            <a:off x="2987675" y="2276475"/>
-            <a:ext cx="8926830" cy="4052570"/>
+            <a:off x="2987675" y="2146935"/>
+            <a:ext cx="8926830" cy="4336415"/>
           </a:xfrm>
           <a:prstGeom prst="rect">
             <a:avLst/>
@@ -14512,7 +14312,7 @@
           <a:p>
             <a:pPr indent="0" fontAlgn="auto">
               <a:lnSpc>
-                <a:spcPct val="130000"/>
+                <a:spcPct val="150000"/>
               </a:lnSpc>
             </a:pPr>
             <a:r>
@@ -14534,7 +14334,7 @@
           <a:p>
             <a:pPr>
               <a:lnSpc>
-                <a:spcPct val="130000"/>
+                <a:spcPct val="150000"/>
               </a:lnSpc>
             </a:pPr>
             <a:r>
@@ -14592,37 +14392,6 @@
           <a:chExt cx="0" cy="0"/>
         </a:xfrm>
       </p:grpSpPr>
-      <p:pic>
-        <p:nvPicPr>
-          <p:cNvPr id="13" name="图片 12"/>
-          <p:cNvPicPr>
-            <a:picLocks noChangeAspect="1"/>
-          </p:cNvPicPr>
-          <p:nvPr/>
-        </p:nvPicPr>
-        <p:blipFill rotWithShape="1">
-          <a:blip r:embed="rId1" cstate="print">
-            <a:extLst>
-              <a:ext uri="{28A0092B-C50C-407E-A947-70E740481C1C}">
-                <a14:useLocalDpi xmlns:a14="http://schemas.microsoft.com/office/drawing/2010/main" val="0"/>
-              </a:ext>
-            </a:extLst>
-          </a:blip>
-          <a:srcRect t="23546" b="8830"/>
-          <a:stretch>
-            <a:fillRect/>
-          </a:stretch>
-        </p:blipFill>
-        <p:spPr>
-          <a:xfrm>
-            <a:off x="9815333" y="135922"/>
-            <a:ext cx="2376667" cy="734513"/>
-          </a:xfrm>
-          <a:prstGeom prst="rect">
-            <a:avLst/>
-          </a:prstGeom>
-        </p:spPr>
-      </p:pic>
       <p:sp>
         <p:nvSpPr>
           <p:cNvPr id="5" name="矩形 4"/>
@@ -14989,7 +14758,7 @@
           <p:cNvSpPr/>
           <p:nvPr>
             <p:custDataLst>
-              <p:tags r:id="rId2"/>
+              <p:tags r:id="rId1"/>
             </p:custDataLst>
           </p:nvPr>
         </p:nvSpPr>
@@ -16059,37 +15828,6 @@
           <a:chExt cx="0" cy="0"/>
         </a:xfrm>
       </p:grpSpPr>
-      <p:pic>
-        <p:nvPicPr>
-          <p:cNvPr id="13" name="图片 12"/>
-          <p:cNvPicPr>
-            <a:picLocks noChangeAspect="1"/>
-          </p:cNvPicPr>
-          <p:nvPr/>
-        </p:nvPicPr>
-        <p:blipFill rotWithShape="1">
-          <a:blip r:embed="rId1" cstate="print">
-            <a:extLst>
-              <a:ext uri="{28A0092B-C50C-407E-A947-70E740481C1C}">
-                <a14:useLocalDpi xmlns:a14="http://schemas.microsoft.com/office/drawing/2010/main" val="0"/>
-              </a:ext>
-            </a:extLst>
-          </a:blip>
-          <a:srcRect t="23546" b="8830"/>
-          <a:stretch>
-            <a:fillRect/>
-          </a:stretch>
-        </p:blipFill>
-        <p:spPr>
-          <a:xfrm>
-            <a:off x="9815333" y="135922"/>
-            <a:ext cx="2376667" cy="734513"/>
-          </a:xfrm>
-          <a:prstGeom prst="rect">
-            <a:avLst/>
-          </a:prstGeom>
-        </p:spPr>
-      </p:pic>
       <p:sp>
         <p:nvSpPr>
           <p:cNvPr id="5" name="矩形 4"/>
@@ -16456,7 +16194,7 @@
           <p:cNvSpPr/>
           <p:nvPr>
             <p:custDataLst>
-              <p:tags r:id="rId2"/>
+              <p:tags r:id="rId1"/>
             </p:custDataLst>
           </p:nvPr>
         </p:nvSpPr>
@@ -17186,37 +16924,6 @@
           <a:chExt cx="0" cy="0"/>
         </a:xfrm>
       </p:grpSpPr>
-      <p:pic>
-        <p:nvPicPr>
-          <p:cNvPr id="13" name="图片 12"/>
-          <p:cNvPicPr>
-            <a:picLocks noChangeAspect="1"/>
-          </p:cNvPicPr>
-          <p:nvPr/>
-        </p:nvPicPr>
-        <p:blipFill rotWithShape="1">
-          <a:blip r:embed="rId1" cstate="print">
-            <a:extLst>
-              <a:ext uri="{28A0092B-C50C-407E-A947-70E740481C1C}">
-                <a14:useLocalDpi xmlns:a14="http://schemas.microsoft.com/office/drawing/2010/main" val="0"/>
-              </a:ext>
-            </a:extLst>
-          </a:blip>
-          <a:srcRect t="23546" b="8830"/>
-          <a:stretch>
-            <a:fillRect/>
-          </a:stretch>
-        </p:blipFill>
-        <p:spPr>
-          <a:xfrm>
-            <a:off x="9815333" y="135922"/>
-            <a:ext cx="2376667" cy="734513"/>
-          </a:xfrm>
-          <a:prstGeom prst="rect">
-            <a:avLst/>
-          </a:prstGeom>
-        </p:spPr>
-      </p:pic>
       <p:sp>
         <p:nvSpPr>
           <p:cNvPr id="5" name="矩形 4"/>
@@ -17583,7 +17290,7 @@
           <p:cNvSpPr/>
           <p:nvPr>
             <p:custDataLst>
-              <p:tags r:id="rId2"/>
+              <p:tags r:id="rId1"/>
             </p:custDataLst>
           </p:nvPr>
         </p:nvSpPr>
@@ -17829,7 +17536,7 @@
           <p:cNvSpPr/>
           <p:nvPr>
             <p:custDataLst>
-              <p:tags r:id="rId3"/>
+              <p:tags r:id="rId2"/>
             </p:custDataLst>
           </p:nvPr>
         </p:nvSpPr>
@@ -18041,37 +17748,6 @@
           <a:chExt cx="0" cy="0"/>
         </a:xfrm>
       </p:grpSpPr>
-      <p:pic>
-        <p:nvPicPr>
-          <p:cNvPr id="13" name="图片 12"/>
-          <p:cNvPicPr>
-            <a:picLocks noChangeAspect="1"/>
-          </p:cNvPicPr>
-          <p:nvPr/>
-        </p:nvPicPr>
-        <p:blipFill rotWithShape="1">
-          <a:blip r:embed="rId1" cstate="print">
-            <a:extLst>
-              <a:ext uri="{28A0092B-C50C-407E-A947-70E740481C1C}">
-                <a14:useLocalDpi xmlns:a14="http://schemas.microsoft.com/office/drawing/2010/main" val="0"/>
-              </a:ext>
-            </a:extLst>
-          </a:blip>
-          <a:srcRect t="23546" b="8830"/>
-          <a:stretch>
-            <a:fillRect/>
-          </a:stretch>
-        </p:blipFill>
-        <p:spPr>
-          <a:xfrm>
-            <a:off x="9815333" y="135922"/>
-            <a:ext cx="2376667" cy="734513"/>
-          </a:xfrm>
-          <a:prstGeom prst="rect">
-            <a:avLst/>
-          </a:prstGeom>
-        </p:spPr>
-      </p:pic>
       <p:sp>
         <p:nvSpPr>
           <p:cNvPr id="5" name="矩形 4"/>
@@ -18438,7 +18114,7 @@
           <p:cNvSpPr/>
           <p:nvPr>
             <p:custDataLst>
-              <p:tags r:id="rId2"/>
+              <p:tags r:id="rId1"/>
             </p:custDataLst>
           </p:nvPr>
         </p:nvSpPr>
@@ -18688,7 +18364,7 @@
           <p:cNvSpPr/>
           <p:nvPr>
             <p:custDataLst>
-              <p:tags r:id="rId3"/>
+              <p:tags r:id="rId2"/>
             </p:custDataLst>
           </p:nvPr>
         </p:nvSpPr>
@@ -18900,37 +18576,6 @@
           <a:chExt cx="0" cy="0"/>
         </a:xfrm>
       </p:grpSpPr>
-      <p:pic>
-        <p:nvPicPr>
-          <p:cNvPr id="13" name="图片 12"/>
-          <p:cNvPicPr>
-            <a:picLocks noChangeAspect="1"/>
-          </p:cNvPicPr>
-          <p:nvPr/>
-        </p:nvPicPr>
-        <p:blipFill rotWithShape="1">
-          <a:blip r:embed="rId1" cstate="print">
-            <a:extLst>
-              <a:ext uri="{28A0092B-C50C-407E-A947-70E740481C1C}">
-                <a14:useLocalDpi xmlns:a14="http://schemas.microsoft.com/office/drawing/2010/main" val="0"/>
-              </a:ext>
-            </a:extLst>
-          </a:blip>
-          <a:srcRect t="23546" b="8830"/>
-          <a:stretch>
-            <a:fillRect/>
-          </a:stretch>
-        </p:blipFill>
-        <p:spPr>
-          <a:xfrm>
-            <a:off x="9815333" y="135922"/>
-            <a:ext cx="2376667" cy="734513"/>
-          </a:xfrm>
-          <a:prstGeom prst="rect">
-            <a:avLst/>
-          </a:prstGeom>
-        </p:spPr>
-      </p:pic>
       <p:sp>
         <p:nvSpPr>
           <p:cNvPr id="5" name="矩形 4"/>
@@ -19297,7 +18942,7 @@
           <p:cNvSpPr/>
           <p:nvPr>
             <p:custDataLst>
-              <p:tags r:id="rId2"/>
+              <p:tags r:id="rId1"/>
             </p:custDataLst>
           </p:nvPr>
         </p:nvSpPr>
@@ -19512,7 +19157,7 @@
           <p:cNvSpPr/>
           <p:nvPr>
             <p:custDataLst>
-              <p:tags r:id="rId3"/>
+              <p:tags r:id="rId2"/>
             </p:custDataLst>
           </p:nvPr>
         </p:nvSpPr>
@@ -19675,37 +19320,6 @@
           <a:chExt cx="0" cy="0"/>
         </a:xfrm>
       </p:grpSpPr>
-      <p:pic>
-        <p:nvPicPr>
-          <p:cNvPr id="13" name="图片 12"/>
-          <p:cNvPicPr>
-            <a:picLocks noChangeAspect="1"/>
-          </p:cNvPicPr>
-          <p:nvPr/>
-        </p:nvPicPr>
-        <p:blipFill rotWithShape="1">
-          <a:blip r:embed="rId1" cstate="print">
-            <a:extLst>
-              <a:ext uri="{28A0092B-C50C-407E-A947-70E740481C1C}">
-                <a14:useLocalDpi xmlns:a14="http://schemas.microsoft.com/office/drawing/2010/main" val="0"/>
-              </a:ext>
-            </a:extLst>
-          </a:blip>
-          <a:srcRect t="23546" b="8830"/>
-          <a:stretch>
-            <a:fillRect/>
-          </a:stretch>
-        </p:blipFill>
-        <p:spPr>
-          <a:xfrm>
-            <a:off x="9815333" y="135922"/>
-            <a:ext cx="2376667" cy="734513"/>
-          </a:xfrm>
-          <a:prstGeom prst="rect">
-            <a:avLst/>
-          </a:prstGeom>
-        </p:spPr>
-      </p:pic>
       <p:sp>
         <p:nvSpPr>
           <p:cNvPr id="5" name="矩形 4"/>
@@ -20123,7 +19737,7 @@
           <p:cNvSpPr/>
           <p:nvPr>
             <p:custDataLst>
-              <p:tags r:id="rId2"/>
+              <p:tags r:id="rId1"/>
             </p:custDataLst>
           </p:nvPr>
         </p:nvSpPr>
@@ -20176,7 +19790,7 @@
           <p:nvPr/>
         </p:nvPicPr>
         <p:blipFill>
-          <a:blip r:embed="rId3"/>
+          <a:blip r:embed="rId2"/>
           <a:stretch>
             <a:fillRect/>
           </a:stretch>
